--- a/docs/High-Performance Implementation of Multigrid Solver for Lattice QCD.pptx
+++ b/docs/High-Performance Implementation of Multigrid Solver for Lattice QCD.pptx
@@ -2,7 +2,7 @@
 <file path=ppt/presentation.xml><?xml version="1.0" encoding="utf-8"?>
 <p:presentation xmlns:p="http://schemas.openxmlformats.org/presentationml/2006/main" xmlns:a="http://schemas.openxmlformats.org/drawingml/2006/main" xmlns:r="http://schemas.openxmlformats.org/officeDocument/2006/relationships">
   <p:sldMasterIdLst>
-    <p:sldMasterId id="2147483648" r:id="rId18"/>
+    <p:sldMasterId id="2147483648" r:id="rId19"/>
   </p:sldMasterIdLst>
   <p:sldIdLst>
     <p:sldId id="256" r:id="rId1"/>
@@ -22,6 +22,7 @@
     <p:sldId id="270" r:id="rId15"/>
     <p:sldId id="271" r:id="rId16"/>
     <p:sldId id="272" r:id="rId17"/>
+    <p:sldId id="273" r:id="rId18"/>
   </p:sldIdLst>
   <p:sldSz cx="12192000" cy="6858000" type="screen16x9"/>
   <p:notesSz cx="6858000" cy="9144000"/>
@@ -30,22 +31,15 @@
 </file>
 
 <file path=ppt/slideLayouts/slideLayout1.xml><?xml version="1.0" encoding="utf-8"?>
-<p:sldLayout xmlns:p="http://schemas.openxmlformats.org/presentationml/2006/main" xmlns:a="http://schemas.openxmlformats.org/drawingml/2006/main" xmlns:r="http://schemas.openxmlformats.org/officeDocument/2006/relationships" type="blank" preserve="1">
-  <p:cSld name="Blank">
-    <p:spTree>
-      <p:nvGrpSpPr>
-        <p:cNvPr id="1" name=""/>
-        <p:cNvGrpSpPr/>
-        <p:nvPr/>
-      </p:nvGrpSpPr>
-      <p:grpSpPr>
-        <a:xfrm>
-          <a:off x="0" y="0"/>
-          <a:ext cx="0" cy="0"/>
-          <a:chOff x="0" y="0"/>
-          <a:chExt cx="0" cy="0"/>
-        </a:xfrm>
-      </p:grpSpPr>
+<p:sldLayout xmlns:p="http://schemas.openxmlformats.org/presentationml/2006/main" xmlns:a="http://schemas.openxmlformats.org/drawingml/2006/main" xmlns:r="http://schemas.openxmlformats.org/officeDocument/2006/relationships" type="blank">
+  <p:cSld>
+    <p:spTree>
+      <p:nvGrpSpPr>
+        <p:cNvPr id="1" name=""/>
+        <p:cNvGrpSpPr/>
+        <p:nvPr/>
+      </p:nvGrpSpPr>
+      <p:grpSpPr/>
     </p:spTree>
   </p:cSld>
   <p:clrMapOvr>
@@ -56,55 +50,43 @@
 
 <file path=ppt/slideMasters/slideMaster1.xml><?xml version="1.0" encoding="utf-8"?>
 <p:sldMaster xmlns:p="http://schemas.openxmlformats.org/presentationml/2006/main" xmlns:a="http://schemas.openxmlformats.org/drawingml/2006/main" xmlns:r="http://schemas.openxmlformats.org/officeDocument/2006/relationships">
-  <p:cSld name="PyQCU MultiGrid">
-    <p:spTree>
-      <p:nvGrpSpPr>
-        <p:cNvPr id="1" name=""/>
-        <p:cNvGrpSpPr/>
-        <p:nvPr/>
-      </p:nvGrpSpPr>
-      <p:grpSpPr>
-        <a:xfrm>
-          <a:off x="0" y="0"/>
-          <a:ext cx="0" cy="0"/>
-          <a:chOff x="0" y="0"/>
-          <a:chExt cx="0" cy="0"/>
-        </a:xfrm>
-      </p:grpSpPr>
+  <p:cSld>
+    <p:spTree>
+      <p:nvGrpSpPr>
+        <p:cNvPr id="1" name=""/>
+        <p:cNvGrpSpPr/>
+        <p:nvPr/>
+      </p:nvGrpSpPr>
+      <p:grpSpPr/>
     </p:spTree>
   </p:cSld>
   <p:clrMap accent1="accent1" accent2="accent2" accent3="accent3" accent4="accent4" accent5="accent5" accent6="accent6" bg1="lt1" bg2="lt2" folHlink="folHlink" hlink="hlink" tx1="dk1" tx2="dk2"/>
   <p:sldLayoutIdLst>
     <p:sldLayoutId id="1" r:id="rId1"/>
   </p:sldLayoutIdLst>
-  <p:txStyles>
-    <p:titleStyle/>
-    <p:bodyStyle/>
-    <p:otherStyle/>
-  </p:txStyles>
 </p:sldMaster>
 </file>
 
 <file path=ppt/slides/slide1.xml><?xml version="1.0" encoding="utf-8"?>
 <p:sld xmlns:p="http://schemas.openxmlformats.org/presentationml/2006/main" xmlns:a="http://schemas.openxmlformats.org/drawingml/2006/main" xmlns:r="http://schemas.openxmlformats.org/officeDocument/2006/relationships">
-  <p:cSld name="">
-    <p:spTree>
-      <p:nvGrpSpPr>
-        <p:cNvPr id="1" name=""/>
-        <p:cNvGrpSpPr/>
-        <p:nvPr/>
-      </p:nvGrpSpPr>
-      <p:grpSpPr>
-        <a:xfrm>
-          <a:off x="0" y="0"/>
-          <a:ext cx="0" cy="0"/>
-          <a:chOff x="0" y="0"/>
-          <a:chExt cx="0" cy="0"/>
-        </a:xfrm>
-      </p:grpSpPr>
-      <p:pic>
-        <p:nvPicPr>
-          <p:cNvPr id="2" name="Slide image" descr="Rendered PyQCU MultiGrid slide"/>
+  <p:cSld>
+    <p:spTree>
+      <p:nvGrpSpPr>
+        <p:cNvPr id="1" name=""/>
+        <p:cNvGrpSpPr/>
+        <p:nvPr/>
+      </p:nvGrpSpPr>
+      <p:grpSpPr>
+        <a:xfrm>
+          <a:off x="0" y="0"/>
+          <a:ext cx="0" cy="0"/>
+          <a:chOff x="0" y="0"/>
+          <a:chExt cx="0" cy="0"/>
+        </a:xfrm>
+      </p:grpSpPr>
+      <p:pic>
+        <p:nvPicPr>
+          <p:cNvPr id="2" name="Slide image"/>
           <p:cNvPicPr>
             <a:picLocks noChangeAspect="1"/>
           </p:cNvPicPr>
@@ -136,24 +118,24 @@
 
 <file path=ppt/slides/slide10.xml><?xml version="1.0" encoding="utf-8"?>
 <p:sld xmlns:p="http://schemas.openxmlformats.org/presentationml/2006/main" xmlns:a="http://schemas.openxmlformats.org/drawingml/2006/main" xmlns:r="http://schemas.openxmlformats.org/officeDocument/2006/relationships">
-  <p:cSld name="">
-    <p:spTree>
-      <p:nvGrpSpPr>
-        <p:cNvPr id="1" name=""/>
-        <p:cNvGrpSpPr/>
-        <p:nvPr/>
-      </p:nvGrpSpPr>
-      <p:grpSpPr>
-        <a:xfrm>
-          <a:off x="0" y="0"/>
-          <a:ext cx="0" cy="0"/>
-          <a:chOff x="0" y="0"/>
-          <a:chExt cx="0" cy="0"/>
-        </a:xfrm>
-      </p:grpSpPr>
-      <p:pic>
-        <p:nvPicPr>
-          <p:cNvPr id="2" name="Slide image" descr="Rendered PyQCU MultiGrid slide"/>
+  <p:cSld>
+    <p:spTree>
+      <p:nvGrpSpPr>
+        <p:cNvPr id="1" name=""/>
+        <p:cNvGrpSpPr/>
+        <p:nvPr/>
+      </p:nvGrpSpPr>
+      <p:grpSpPr>
+        <a:xfrm>
+          <a:off x="0" y="0"/>
+          <a:ext cx="0" cy="0"/>
+          <a:chOff x="0" y="0"/>
+          <a:chExt cx="0" cy="0"/>
+        </a:xfrm>
+      </p:grpSpPr>
+      <p:pic>
+        <p:nvPicPr>
+          <p:cNvPr id="2" name="Slide image"/>
           <p:cNvPicPr>
             <a:picLocks noChangeAspect="1"/>
           </p:cNvPicPr>
@@ -185,24 +167,24 @@
 
 <file path=ppt/slides/slide11.xml><?xml version="1.0" encoding="utf-8"?>
 <p:sld xmlns:p="http://schemas.openxmlformats.org/presentationml/2006/main" xmlns:a="http://schemas.openxmlformats.org/drawingml/2006/main" xmlns:r="http://schemas.openxmlformats.org/officeDocument/2006/relationships">
-  <p:cSld name="">
-    <p:spTree>
-      <p:nvGrpSpPr>
-        <p:cNvPr id="1" name=""/>
-        <p:cNvGrpSpPr/>
-        <p:nvPr/>
-      </p:nvGrpSpPr>
-      <p:grpSpPr>
-        <a:xfrm>
-          <a:off x="0" y="0"/>
-          <a:ext cx="0" cy="0"/>
-          <a:chOff x="0" y="0"/>
-          <a:chExt cx="0" cy="0"/>
-        </a:xfrm>
-      </p:grpSpPr>
-      <p:pic>
-        <p:nvPicPr>
-          <p:cNvPr id="2" name="Slide image" descr="Rendered PyQCU MultiGrid slide"/>
+  <p:cSld>
+    <p:spTree>
+      <p:nvGrpSpPr>
+        <p:cNvPr id="1" name=""/>
+        <p:cNvGrpSpPr/>
+        <p:nvPr/>
+      </p:nvGrpSpPr>
+      <p:grpSpPr>
+        <a:xfrm>
+          <a:off x="0" y="0"/>
+          <a:ext cx="0" cy="0"/>
+          <a:chOff x="0" y="0"/>
+          <a:chExt cx="0" cy="0"/>
+        </a:xfrm>
+      </p:grpSpPr>
+      <p:pic>
+        <p:nvPicPr>
+          <p:cNvPr id="2" name="Slide image"/>
           <p:cNvPicPr>
             <a:picLocks noChangeAspect="1"/>
           </p:cNvPicPr>
@@ -234,24 +216,24 @@
 
 <file path=ppt/slides/slide12.xml><?xml version="1.0" encoding="utf-8"?>
 <p:sld xmlns:p="http://schemas.openxmlformats.org/presentationml/2006/main" xmlns:a="http://schemas.openxmlformats.org/drawingml/2006/main" xmlns:r="http://schemas.openxmlformats.org/officeDocument/2006/relationships">
-  <p:cSld name="">
-    <p:spTree>
-      <p:nvGrpSpPr>
-        <p:cNvPr id="1" name=""/>
-        <p:cNvGrpSpPr/>
-        <p:nvPr/>
-      </p:nvGrpSpPr>
-      <p:grpSpPr>
-        <a:xfrm>
-          <a:off x="0" y="0"/>
-          <a:ext cx="0" cy="0"/>
-          <a:chOff x="0" y="0"/>
-          <a:chExt cx="0" cy="0"/>
-        </a:xfrm>
-      </p:grpSpPr>
-      <p:pic>
-        <p:nvPicPr>
-          <p:cNvPr id="2" name="Slide image" descr="Rendered PyQCU MultiGrid slide"/>
+  <p:cSld>
+    <p:spTree>
+      <p:nvGrpSpPr>
+        <p:cNvPr id="1" name=""/>
+        <p:cNvGrpSpPr/>
+        <p:nvPr/>
+      </p:nvGrpSpPr>
+      <p:grpSpPr>
+        <a:xfrm>
+          <a:off x="0" y="0"/>
+          <a:ext cx="0" cy="0"/>
+          <a:chOff x="0" y="0"/>
+          <a:chExt cx="0" cy="0"/>
+        </a:xfrm>
+      </p:grpSpPr>
+      <p:pic>
+        <p:nvPicPr>
+          <p:cNvPr id="2" name="Slide image"/>
           <p:cNvPicPr>
             <a:picLocks noChangeAspect="1"/>
           </p:cNvPicPr>
@@ -283,24 +265,24 @@
 
 <file path=ppt/slides/slide13.xml><?xml version="1.0" encoding="utf-8"?>
 <p:sld xmlns:p="http://schemas.openxmlformats.org/presentationml/2006/main" xmlns:a="http://schemas.openxmlformats.org/drawingml/2006/main" xmlns:r="http://schemas.openxmlformats.org/officeDocument/2006/relationships">
-  <p:cSld name="">
-    <p:spTree>
-      <p:nvGrpSpPr>
-        <p:cNvPr id="1" name=""/>
-        <p:cNvGrpSpPr/>
-        <p:nvPr/>
-      </p:nvGrpSpPr>
-      <p:grpSpPr>
-        <a:xfrm>
-          <a:off x="0" y="0"/>
-          <a:ext cx="0" cy="0"/>
-          <a:chOff x="0" y="0"/>
-          <a:chExt cx="0" cy="0"/>
-        </a:xfrm>
-      </p:grpSpPr>
-      <p:pic>
-        <p:nvPicPr>
-          <p:cNvPr id="2" name="Slide image" descr="Rendered PyQCU MultiGrid slide"/>
+  <p:cSld>
+    <p:spTree>
+      <p:nvGrpSpPr>
+        <p:cNvPr id="1" name=""/>
+        <p:cNvGrpSpPr/>
+        <p:nvPr/>
+      </p:nvGrpSpPr>
+      <p:grpSpPr>
+        <a:xfrm>
+          <a:off x="0" y="0"/>
+          <a:ext cx="0" cy="0"/>
+          <a:chOff x="0" y="0"/>
+          <a:chExt cx="0" cy="0"/>
+        </a:xfrm>
+      </p:grpSpPr>
+      <p:pic>
+        <p:nvPicPr>
+          <p:cNvPr id="2" name="Slide image"/>
           <p:cNvPicPr>
             <a:picLocks noChangeAspect="1"/>
           </p:cNvPicPr>
@@ -332,24 +314,24 @@
 
 <file path=ppt/slides/slide14.xml><?xml version="1.0" encoding="utf-8"?>
 <p:sld xmlns:p="http://schemas.openxmlformats.org/presentationml/2006/main" xmlns:a="http://schemas.openxmlformats.org/drawingml/2006/main" xmlns:r="http://schemas.openxmlformats.org/officeDocument/2006/relationships">
-  <p:cSld name="">
-    <p:spTree>
-      <p:nvGrpSpPr>
-        <p:cNvPr id="1" name=""/>
-        <p:cNvGrpSpPr/>
-        <p:nvPr/>
-      </p:nvGrpSpPr>
-      <p:grpSpPr>
-        <a:xfrm>
-          <a:off x="0" y="0"/>
-          <a:ext cx="0" cy="0"/>
-          <a:chOff x="0" y="0"/>
-          <a:chExt cx="0" cy="0"/>
-        </a:xfrm>
-      </p:grpSpPr>
-      <p:pic>
-        <p:nvPicPr>
-          <p:cNvPr id="2" name="Slide image" descr="Rendered PyQCU MultiGrid slide"/>
+  <p:cSld>
+    <p:spTree>
+      <p:nvGrpSpPr>
+        <p:cNvPr id="1" name=""/>
+        <p:cNvGrpSpPr/>
+        <p:nvPr/>
+      </p:nvGrpSpPr>
+      <p:grpSpPr>
+        <a:xfrm>
+          <a:off x="0" y="0"/>
+          <a:ext cx="0" cy="0"/>
+          <a:chOff x="0" y="0"/>
+          <a:chExt cx="0" cy="0"/>
+        </a:xfrm>
+      </p:grpSpPr>
+      <p:pic>
+        <p:nvPicPr>
+          <p:cNvPr id="2" name="Slide image"/>
           <p:cNvPicPr>
             <a:picLocks noChangeAspect="1"/>
           </p:cNvPicPr>
@@ -381,24 +363,24 @@
 
 <file path=ppt/slides/slide15.xml><?xml version="1.0" encoding="utf-8"?>
 <p:sld xmlns:p="http://schemas.openxmlformats.org/presentationml/2006/main" xmlns:a="http://schemas.openxmlformats.org/drawingml/2006/main" xmlns:r="http://schemas.openxmlformats.org/officeDocument/2006/relationships">
-  <p:cSld name="">
-    <p:spTree>
-      <p:nvGrpSpPr>
-        <p:cNvPr id="1" name=""/>
-        <p:cNvGrpSpPr/>
-        <p:nvPr/>
-      </p:nvGrpSpPr>
-      <p:grpSpPr>
-        <a:xfrm>
-          <a:off x="0" y="0"/>
-          <a:ext cx="0" cy="0"/>
-          <a:chOff x="0" y="0"/>
-          <a:chExt cx="0" cy="0"/>
-        </a:xfrm>
-      </p:grpSpPr>
-      <p:pic>
-        <p:nvPicPr>
-          <p:cNvPr id="2" name="Slide image" descr="Rendered PyQCU MultiGrid slide"/>
+  <p:cSld>
+    <p:spTree>
+      <p:nvGrpSpPr>
+        <p:cNvPr id="1" name=""/>
+        <p:cNvGrpSpPr/>
+        <p:nvPr/>
+      </p:nvGrpSpPr>
+      <p:grpSpPr>
+        <a:xfrm>
+          <a:off x="0" y="0"/>
+          <a:ext cx="0" cy="0"/>
+          <a:chOff x="0" y="0"/>
+          <a:chExt cx="0" cy="0"/>
+        </a:xfrm>
+      </p:grpSpPr>
+      <p:pic>
+        <p:nvPicPr>
+          <p:cNvPr id="2" name="Slide image"/>
           <p:cNvPicPr>
             <a:picLocks noChangeAspect="1"/>
           </p:cNvPicPr>
@@ -430,24 +412,24 @@
 
 <file path=ppt/slides/slide16.xml><?xml version="1.0" encoding="utf-8"?>
 <p:sld xmlns:p="http://schemas.openxmlformats.org/presentationml/2006/main" xmlns:a="http://schemas.openxmlformats.org/drawingml/2006/main" xmlns:r="http://schemas.openxmlformats.org/officeDocument/2006/relationships">
-  <p:cSld name="">
-    <p:spTree>
-      <p:nvGrpSpPr>
-        <p:cNvPr id="1" name=""/>
-        <p:cNvGrpSpPr/>
-        <p:nvPr/>
-      </p:nvGrpSpPr>
-      <p:grpSpPr>
-        <a:xfrm>
-          <a:off x="0" y="0"/>
-          <a:ext cx="0" cy="0"/>
-          <a:chOff x="0" y="0"/>
-          <a:chExt cx="0" cy="0"/>
-        </a:xfrm>
-      </p:grpSpPr>
-      <p:pic>
-        <p:nvPicPr>
-          <p:cNvPr id="2" name="Slide image" descr="Rendered PyQCU MultiGrid slide"/>
+  <p:cSld>
+    <p:spTree>
+      <p:nvGrpSpPr>
+        <p:cNvPr id="1" name=""/>
+        <p:cNvGrpSpPr/>
+        <p:nvPr/>
+      </p:nvGrpSpPr>
+      <p:grpSpPr>
+        <a:xfrm>
+          <a:off x="0" y="0"/>
+          <a:ext cx="0" cy="0"/>
+          <a:chOff x="0" y="0"/>
+          <a:chExt cx="0" cy="0"/>
+        </a:xfrm>
+      </p:grpSpPr>
+      <p:pic>
+        <p:nvPicPr>
+          <p:cNvPr id="2" name="Slide image"/>
           <p:cNvPicPr>
             <a:picLocks noChangeAspect="1"/>
           </p:cNvPicPr>
@@ -479,24 +461,73 @@
 
 <file path=ppt/slides/slide17.xml><?xml version="1.0" encoding="utf-8"?>
 <p:sld xmlns:p="http://schemas.openxmlformats.org/presentationml/2006/main" xmlns:a="http://schemas.openxmlformats.org/drawingml/2006/main" xmlns:r="http://schemas.openxmlformats.org/officeDocument/2006/relationships">
-  <p:cSld name="">
-    <p:spTree>
-      <p:nvGrpSpPr>
-        <p:cNvPr id="1" name=""/>
-        <p:cNvGrpSpPr/>
-        <p:nvPr/>
-      </p:nvGrpSpPr>
-      <p:grpSpPr>
-        <a:xfrm>
-          <a:off x="0" y="0"/>
-          <a:ext cx="0" cy="0"/>
-          <a:chOff x="0" y="0"/>
-          <a:chExt cx="0" cy="0"/>
-        </a:xfrm>
-      </p:grpSpPr>
-      <p:pic>
-        <p:nvPicPr>
-          <p:cNvPr id="2" name="Slide image" descr="Rendered PyQCU MultiGrid slide"/>
+  <p:cSld>
+    <p:spTree>
+      <p:nvGrpSpPr>
+        <p:cNvPr id="1" name=""/>
+        <p:cNvGrpSpPr/>
+        <p:nvPr/>
+      </p:nvGrpSpPr>
+      <p:grpSpPr>
+        <a:xfrm>
+          <a:off x="0" y="0"/>
+          <a:ext cx="0" cy="0"/>
+          <a:chOff x="0" y="0"/>
+          <a:chExt cx="0" cy="0"/>
+        </a:xfrm>
+      </p:grpSpPr>
+      <p:pic>
+        <p:nvPicPr>
+          <p:cNvPr id="2" name="Slide image"/>
+          <p:cNvPicPr>
+            <a:picLocks noChangeAspect="1"/>
+          </p:cNvPicPr>
+          <p:nvPr/>
+        </p:nvPicPr>
+        <p:blipFill>
+          <a:blip r:embed="rId1"/>
+          <a:stretch>
+            <a:fillRect/>
+          </a:stretch>
+        </p:blipFill>
+        <p:spPr>
+          <a:xfrm>
+            <a:off x="0" y="0"/>
+            <a:ext cx="12192000" cy="6858000"/>
+          </a:xfrm>
+          <a:prstGeom prst="rect">
+            <a:avLst/>
+          </a:prstGeom>
+        </p:spPr>
+      </p:pic>
+    </p:spTree>
+  </p:cSld>
+  <p:clrMapOvr>
+    <a:masterClrMapping/>
+  </p:clrMapOvr>
+</p:sld>
+</file>
+
+<file path=ppt/slides/slide18.xml><?xml version="1.0" encoding="utf-8"?>
+<p:sld xmlns:p="http://schemas.openxmlformats.org/presentationml/2006/main" xmlns:a="http://schemas.openxmlformats.org/drawingml/2006/main" xmlns:r="http://schemas.openxmlformats.org/officeDocument/2006/relationships">
+  <p:cSld>
+    <p:spTree>
+      <p:nvGrpSpPr>
+        <p:cNvPr id="1" name=""/>
+        <p:cNvGrpSpPr/>
+        <p:nvPr/>
+      </p:nvGrpSpPr>
+      <p:grpSpPr>
+        <a:xfrm>
+          <a:off x="0" y="0"/>
+          <a:ext cx="0" cy="0"/>
+          <a:chOff x="0" y="0"/>
+          <a:chExt cx="0" cy="0"/>
+        </a:xfrm>
+      </p:grpSpPr>
+      <p:pic>
+        <p:nvPicPr>
+          <p:cNvPr id="2" name="Slide image"/>
           <p:cNvPicPr>
             <a:picLocks noChangeAspect="1"/>
           </p:cNvPicPr>
@@ -528,24 +559,24 @@
 
 <file path=ppt/slides/slide2.xml><?xml version="1.0" encoding="utf-8"?>
 <p:sld xmlns:p="http://schemas.openxmlformats.org/presentationml/2006/main" xmlns:a="http://schemas.openxmlformats.org/drawingml/2006/main" xmlns:r="http://schemas.openxmlformats.org/officeDocument/2006/relationships">
-  <p:cSld name="">
-    <p:spTree>
-      <p:nvGrpSpPr>
-        <p:cNvPr id="1" name=""/>
-        <p:cNvGrpSpPr/>
-        <p:nvPr/>
-      </p:nvGrpSpPr>
-      <p:grpSpPr>
-        <a:xfrm>
-          <a:off x="0" y="0"/>
-          <a:ext cx="0" cy="0"/>
-          <a:chOff x="0" y="0"/>
-          <a:chExt cx="0" cy="0"/>
-        </a:xfrm>
-      </p:grpSpPr>
-      <p:pic>
-        <p:nvPicPr>
-          <p:cNvPr id="2" name="Slide image" descr="Rendered PyQCU MultiGrid slide"/>
+  <p:cSld>
+    <p:spTree>
+      <p:nvGrpSpPr>
+        <p:cNvPr id="1" name=""/>
+        <p:cNvGrpSpPr/>
+        <p:nvPr/>
+      </p:nvGrpSpPr>
+      <p:grpSpPr>
+        <a:xfrm>
+          <a:off x="0" y="0"/>
+          <a:ext cx="0" cy="0"/>
+          <a:chOff x="0" y="0"/>
+          <a:chExt cx="0" cy="0"/>
+        </a:xfrm>
+      </p:grpSpPr>
+      <p:pic>
+        <p:nvPicPr>
+          <p:cNvPr id="2" name="Slide image"/>
           <p:cNvPicPr>
             <a:picLocks noChangeAspect="1"/>
           </p:cNvPicPr>
@@ -577,24 +608,24 @@
 
 <file path=ppt/slides/slide3.xml><?xml version="1.0" encoding="utf-8"?>
 <p:sld xmlns:p="http://schemas.openxmlformats.org/presentationml/2006/main" xmlns:a="http://schemas.openxmlformats.org/drawingml/2006/main" xmlns:r="http://schemas.openxmlformats.org/officeDocument/2006/relationships">
-  <p:cSld name="">
-    <p:spTree>
-      <p:nvGrpSpPr>
-        <p:cNvPr id="1" name=""/>
-        <p:cNvGrpSpPr/>
-        <p:nvPr/>
-      </p:nvGrpSpPr>
-      <p:grpSpPr>
-        <a:xfrm>
-          <a:off x="0" y="0"/>
-          <a:ext cx="0" cy="0"/>
-          <a:chOff x="0" y="0"/>
-          <a:chExt cx="0" cy="0"/>
-        </a:xfrm>
-      </p:grpSpPr>
-      <p:pic>
-        <p:nvPicPr>
-          <p:cNvPr id="2" name="Slide image" descr="Rendered PyQCU MultiGrid slide"/>
+  <p:cSld>
+    <p:spTree>
+      <p:nvGrpSpPr>
+        <p:cNvPr id="1" name=""/>
+        <p:cNvGrpSpPr/>
+        <p:nvPr/>
+      </p:nvGrpSpPr>
+      <p:grpSpPr>
+        <a:xfrm>
+          <a:off x="0" y="0"/>
+          <a:ext cx="0" cy="0"/>
+          <a:chOff x="0" y="0"/>
+          <a:chExt cx="0" cy="0"/>
+        </a:xfrm>
+      </p:grpSpPr>
+      <p:pic>
+        <p:nvPicPr>
+          <p:cNvPr id="2" name="Slide image"/>
           <p:cNvPicPr>
             <a:picLocks noChangeAspect="1"/>
           </p:cNvPicPr>
@@ -626,24 +657,24 @@
 
 <file path=ppt/slides/slide4.xml><?xml version="1.0" encoding="utf-8"?>
 <p:sld xmlns:p="http://schemas.openxmlformats.org/presentationml/2006/main" xmlns:a="http://schemas.openxmlformats.org/drawingml/2006/main" xmlns:r="http://schemas.openxmlformats.org/officeDocument/2006/relationships">
-  <p:cSld name="">
-    <p:spTree>
-      <p:nvGrpSpPr>
-        <p:cNvPr id="1" name=""/>
-        <p:cNvGrpSpPr/>
-        <p:nvPr/>
-      </p:nvGrpSpPr>
-      <p:grpSpPr>
-        <a:xfrm>
-          <a:off x="0" y="0"/>
-          <a:ext cx="0" cy="0"/>
-          <a:chOff x="0" y="0"/>
-          <a:chExt cx="0" cy="0"/>
-        </a:xfrm>
-      </p:grpSpPr>
-      <p:pic>
-        <p:nvPicPr>
-          <p:cNvPr id="2" name="Slide image" descr="Rendered PyQCU MultiGrid slide"/>
+  <p:cSld>
+    <p:spTree>
+      <p:nvGrpSpPr>
+        <p:cNvPr id="1" name=""/>
+        <p:cNvGrpSpPr/>
+        <p:nvPr/>
+      </p:nvGrpSpPr>
+      <p:grpSpPr>
+        <a:xfrm>
+          <a:off x="0" y="0"/>
+          <a:ext cx="0" cy="0"/>
+          <a:chOff x="0" y="0"/>
+          <a:chExt cx="0" cy="0"/>
+        </a:xfrm>
+      </p:grpSpPr>
+      <p:pic>
+        <p:nvPicPr>
+          <p:cNvPr id="2" name="Slide image"/>
           <p:cNvPicPr>
             <a:picLocks noChangeAspect="1"/>
           </p:cNvPicPr>
@@ -675,24 +706,24 @@
 
 <file path=ppt/slides/slide5.xml><?xml version="1.0" encoding="utf-8"?>
 <p:sld xmlns:p="http://schemas.openxmlformats.org/presentationml/2006/main" xmlns:a="http://schemas.openxmlformats.org/drawingml/2006/main" xmlns:r="http://schemas.openxmlformats.org/officeDocument/2006/relationships">
-  <p:cSld name="">
-    <p:spTree>
-      <p:nvGrpSpPr>
-        <p:cNvPr id="1" name=""/>
-        <p:cNvGrpSpPr/>
-        <p:nvPr/>
-      </p:nvGrpSpPr>
-      <p:grpSpPr>
-        <a:xfrm>
-          <a:off x="0" y="0"/>
-          <a:ext cx="0" cy="0"/>
-          <a:chOff x="0" y="0"/>
-          <a:chExt cx="0" cy="0"/>
-        </a:xfrm>
-      </p:grpSpPr>
-      <p:pic>
-        <p:nvPicPr>
-          <p:cNvPr id="2" name="Slide image" descr="Rendered PyQCU MultiGrid slide"/>
+  <p:cSld>
+    <p:spTree>
+      <p:nvGrpSpPr>
+        <p:cNvPr id="1" name=""/>
+        <p:cNvGrpSpPr/>
+        <p:nvPr/>
+      </p:nvGrpSpPr>
+      <p:grpSpPr>
+        <a:xfrm>
+          <a:off x="0" y="0"/>
+          <a:ext cx="0" cy="0"/>
+          <a:chOff x="0" y="0"/>
+          <a:chExt cx="0" cy="0"/>
+        </a:xfrm>
+      </p:grpSpPr>
+      <p:pic>
+        <p:nvPicPr>
+          <p:cNvPr id="2" name="Slide image"/>
           <p:cNvPicPr>
             <a:picLocks noChangeAspect="1"/>
           </p:cNvPicPr>
@@ -724,24 +755,24 @@
 
 <file path=ppt/slides/slide6.xml><?xml version="1.0" encoding="utf-8"?>
 <p:sld xmlns:p="http://schemas.openxmlformats.org/presentationml/2006/main" xmlns:a="http://schemas.openxmlformats.org/drawingml/2006/main" xmlns:r="http://schemas.openxmlformats.org/officeDocument/2006/relationships">
-  <p:cSld name="">
-    <p:spTree>
-      <p:nvGrpSpPr>
-        <p:cNvPr id="1" name=""/>
-        <p:cNvGrpSpPr/>
-        <p:nvPr/>
-      </p:nvGrpSpPr>
-      <p:grpSpPr>
-        <a:xfrm>
-          <a:off x="0" y="0"/>
-          <a:ext cx="0" cy="0"/>
-          <a:chOff x="0" y="0"/>
-          <a:chExt cx="0" cy="0"/>
-        </a:xfrm>
-      </p:grpSpPr>
-      <p:pic>
-        <p:nvPicPr>
-          <p:cNvPr id="2" name="Slide image" descr="Rendered PyQCU MultiGrid slide"/>
+  <p:cSld>
+    <p:spTree>
+      <p:nvGrpSpPr>
+        <p:cNvPr id="1" name=""/>
+        <p:cNvGrpSpPr/>
+        <p:nvPr/>
+      </p:nvGrpSpPr>
+      <p:grpSpPr>
+        <a:xfrm>
+          <a:off x="0" y="0"/>
+          <a:ext cx="0" cy="0"/>
+          <a:chOff x="0" y="0"/>
+          <a:chExt cx="0" cy="0"/>
+        </a:xfrm>
+      </p:grpSpPr>
+      <p:pic>
+        <p:nvPicPr>
+          <p:cNvPr id="2" name="Slide image"/>
           <p:cNvPicPr>
             <a:picLocks noChangeAspect="1"/>
           </p:cNvPicPr>
@@ -773,24 +804,24 @@
 
 <file path=ppt/slides/slide7.xml><?xml version="1.0" encoding="utf-8"?>
 <p:sld xmlns:p="http://schemas.openxmlformats.org/presentationml/2006/main" xmlns:a="http://schemas.openxmlformats.org/drawingml/2006/main" xmlns:r="http://schemas.openxmlformats.org/officeDocument/2006/relationships">
-  <p:cSld name="">
-    <p:spTree>
-      <p:nvGrpSpPr>
-        <p:cNvPr id="1" name=""/>
-        <p:cNvGrpSpPr/>
-        <p:nvPr/>
-      </p:nvGrpSpPr>
-      <p:grpSpPr>
-        <a:xfrm>
-          <a:off x="0" y="0"/>
-          <a:ext cx="0" cy="0"/>
-          <a:chOff x="0" y="0"/>
-          <a:chExt cx="0" cy="0"/>
-        </a:xfrm>
-      </p:grpSpPr>
-      <p:pic>
-        <p:nvPicPr>
-          <p:cNvPr id="2" name="Slide image" descr="Rendered PyQCU MultiGrid slide"/>
+  <p:cSld>
+    <p:spTree>
+      <p:nvGrpSpPr>
+        <p:cNvPr id="1" name=""/>
+        <p:cNvGrpSpPr/>
+        <p:nvPr/>
+      </p:nvGrpSpPr>
+      <p:grpSpPr>
+        <a:xfrm>
+          <a:off x="0" y="0"/>
+          <a:ext cx="0" cy="0"/>
+          <a:chOff x="0" y="0"/>
+          <a:chExt cx="0" cy="0"/>
+        </a:xfrm>
+      </p:grpSpPr>
+      <p:pic>
+        <p:nvPicPr>
+          <p:cNvPr id="2" name="Slide image"/>
           <p:cNvPicPr>
             <a:picLocks noChangeAspect="1"/>
           </p:cNvPicPr>
@@ -822,24 +853,24 @@
 
 <file path=ppt/slides/slide8.xml><?xml version="1.0" encoding="utf-8"?>
 <p:sld xmlns:p="http://schemas.openxmlformats.org/presentationml/2006/main" xmlns:a="http://schemas.openxmlformats.org/drawingml/2006/main" xmlns:r="http://schemas.openxmlformats.org/officeDocument/2006/relationships">
-  <p:cSld name="">
-    <p:spTree>
-      <p:nvGrpSpPr>
-        <p:cNvPr id="1" name=""/>
-        <p:cNvGrpSpPr/>
-        <p:nvPr/>
-      </p:nvGrpSpPr>
-      <p:grpSpPr>
-        <a:xfrm>
-          <a:off x="0" y="0"/>
-          <a:ext cx="0" cy="0"/>
-          <a:chOff x="0" y="0"/>
-          <a:chExt cx="0" cy="0"/>
-        </a:xfrm>
-      </p:grpSpPr>
-      <p:pic>
-        <p:nvPicPr>
-          <p:cNvPr id="2" name="Slide image" descr="Rendered PyQCU MultiGrid slide"/>
+  <p:cSld>
+    <p:spTree>
+      <p:nvGrpSpPr>
+        <p:cNvPr id="1" name=""/>
+        <p:cNvGrpSpPr/>
+        <p:nvPr/>
+      </p:nvGrpSpPr>
+      <p:grpSpPr>
+        <a:xfrm>
+          <a:off x="0" y="0"/>
+          <a:ext cx="0" cy="0"/>
+          <a:chOff x="0" y="0"/>
+          <a:chExt cx="0" cy="0"/>
+        </a:xfrm>
+      </p:grpSpPr>
+      <p:pic>
+        <p:nvPicPr>
+          <p:cNvPr id="2" name="Slide image"/>
           <p:cNvPicPr>
             <a:picLocks noChangeAspect="1"/>
           </p:cNvPicPr>
@@ -871,24 +902,24 @@
 
 <file path=ppt/slides/slide9.xml><?xml version="1.0" encoding="utf-8"?>
 <p:sld xmlns:p="http://schemas.openxmlformats.org/presentationml/2006/main" xmlns:a="http://schemas.openxmlformats.org/drawingml/2006/main" xmlns:r="http://schemas.openxmlformats.org/officeDocument/2006/relationships">
-  <p:cSld name="">
-    <p:spTree>
-      <p:nvGrpSpPr>
-        <p:cNvPr id="1" name=""/>
-        <p:cNvGrpSpPr/>
-        <p:nvPr/>
-      </p:nvGrpSpPr>
-      <p:grpSpPr>
-        <a:xfrm>
-          <a:off x="0" y="0"/>
-          <a:ext cx="0" cy="0"/>
-          <a:chOff x="0" y="0"/>
-          <a:chExt cx="0" cy="0"/>
-        </a:xfrm>
-      </p:grpSpPr>
-      <p:pic>
-        <p:nvPicPr>
-          <p:cNvPr id="2" name="Slide image" descr="Rendered PyQCU MultiGrid slide"/>
+  <p:cSld>
+    <p:spTree>
+      <p:nvGrpSpPr>
+        <p:cNvPr id="1" name=""/>
+        <p:cNvGrpSpPr/>
+        <p:nvPr/>
+      </p:nvGrpSpPr>
+      <p:grpSpPr>
+        <a:xfrm>
+          <a:off x="0" y="0"/>
+          <a:ext cx="0" cy="0"/>
+          <a:chOff x="0" y="0"/>
+          <a:chExt cx="0" cy="0"/>
+        </a:xfrm>
+      </p:grpSpPr>
+      <p:pic>
+        <p:nvPicPr>
+          <p:cNvPr id="2" name="Slide image"/>
           <p:cNvPicPr>
             <a:picLocks noChangeAspect="1"/>
           </p:cNvPicPr>
@@ -923,52 +954,50 @@
   <a:themeElements>
     <a:clrScheme name="PyQCU">
       <a:dk1>
-        <a:srgbClr val="17212B"/>
+        <a:srgbClr val="1B2430"/>
       </a:dk1>
       <a:lt1>
         <a:srgbClr val="FFFFFF"/>
       </a:lt1>
       <a:dk2>
-        <a:srgbClr val="12355B"/>
+        <a:srgbClr val="17365D"/>
       </a:dk2>
       <a:lt2>
-        <a:srgbClr val="EEF3F6"/>
+        <a:srgbClr val="EEF4FA"/>
       </a:lt2>
       <a:accent1>
-        <a:srgbClr val="245BA3"/>
+        <a:srgbClr val="2E6DB4"/>
       </a:accent1>
       <a:accent2>
-        <a:srgbClr val="0B7285"/>
+        <a:srgbClr val="168C8C"/>
       </a:accent2>
       <a:accent3>
-        <a:srgbClr val="D08A1F"/>
+        <a:srgbClr val="C58A1A"/>
       </a:accent3>
       <a:accent4>
-        <a:srgbClr val="C94C5A"/>
+        <a:srgbClr val="D35B5B"/>
       </a:accent4>
       <a:accent5>
-        <a:srgbClr val="53A6B8"/>
+        <a:srgbClr val="687483"/>
       </a:accent5>
       <a:accent6>
-        <a:srgbClr val="3A7D5C"/>
+        <a:srgbClr val="17365D"/>
       </a:accent6>
       <a:hlink>
-        <a:srgbClr val="245BA3"/>
+        <a:srgbClr val="2E6DB4"/>
       </a:hlink>
       <a:folHlink>
-        <a:srgbClr val="C94C5A"/>
+        <a:srgbClr val="D35B5B"/>
       </a:folHlink>
     </a:clrScheme>
     <a:fontScheme name="PyQCU">
       <a:majorFont>
-        <a:latin typeface="AR PL UMing CN"/>
-        <a:ea typeface="AR PL UMing CN"/>
-        <a:cs typeface=""/>
+        <a:latin typeface="TeX Gyre Heros"/>
+        <a:ea typeface="FandolHei"/>
       </a:majorFont>
       <a:minorFont>
-        <a:latin typeface="AR PL UMing CN"/>
-        <a:ea typeface="AR PL UMing CN"/>
-        <a:cs typeface=""/>
+        <a:latin typeface="TeX Gyre Termes"/>
+        <a:ea typeface="FandolSong"/>
       </a:minorFont>
     </a:fontScheme>
     <a:fmtScheme name="PyQCU">
@@ -976,59 +1005,28 @@
         <a:solidFill>
           <a:schemeClr val="phClr"/>
         </a:solidFill>
-        <a:gradFill rotWithShape="1">
-          <a:gsLst>
-            <a:gs pos="0">
-              <a:schemeClr val="phClr">
-                <a:lumMod val="110000"/>
-                <a:satMod val="105000"/>
-              </a:schemeClr>
-            </a:gs>
-            <a:gs pos="100000">
-              <a:schemeClr val="phClr">
-                <a:lumMod val="90000"/>
-                <a:satMod val="105000"/>
-              </a:schemeClr>
-            </a:gs>
-          </a:gsLst>
-          <a:lin ang="5400000" scaled="0"/>
-        </a:gradFill>
-        <a:gradFill rotWithShape="1">
-          <a:gsLst>
-            <a:gs pos="0">
-              <a:schemeClr val="phClr">
-                <a:lumMod val="110000"/>
-                <a:satMod val="105000"/>
-              </a:schemeClr>
-            </a:gs>
-            <a:gs pos="100000">
-              <a:schemeClr val="phClr">
-                <a:lumMod val="90000"/>
-                <a:satMod val="105000"/>
-              </a:schemeClr>
-            </a:gs>
-          </a:gsLst>
-          <a:lin ang="5400000" scaled="0"/>
-        </a:gradFill>
+        <a:solidFill>
+          <a:schemeClr val="phClr"/>
+        </a:solidFill>
+        <a:solidFill>
+          <a:schemeClr val="phClr"/>
+        </a:solidFill>
       </a:fillStyleLst>
       <a:lnStyleLst>
-        <a:ln w="6350" cap="flat" cmpd="sng" algn="ctr">
+        <a:ln w="6350">
           <a:solidFill>
             <a:schemeClr val="phClr"/>
           </a:solidFill>
-          <a:prstDash val="solid"/>
         </a:ln>
-        <a:ln w="12700" cap="flat" cmpd="sng" algn="ctr">
+        <a:ln w="12700">
           <a:solidFill>
             <a:schemeClr val="phClr"/>
           </a:solidFill>
-          <a:prstDash val="solid"/>
         </a:ln>
-        <a:ln w="19050" cap="flat" cmpd="sng" algn="ctr">
+        <a:ln w="19050">
           <a:solidFill>
             <a:schemeClr val="phClr"/>
           </a:solidFill>
-          <a:prstDash val="solid"/>
         </a:ln>
       </a:lnStyleLst>
       <a:effectStyleLst>

--- a/docs/High-Performance Implementation of Multigrid Solver for Lattice QCD.pptx
+++ b/docs/High-Performance Implementation of Multigrid Solver for Lattice QCD.pptx
@@ -2,7 +2,7 @@
 <file path=ppt/presentation.xml><?xml version="1.0" encoding="utf-8"?>
 <p:presentation xmlns:p="http://schemas.openxmlformats.org/presentationml/2006/main" xmlns:a="http://schemas.openxmlformats.org/drawingml/2006/main" xmlns:r="http://schemas.openxmlformats.org/officeDocument/2006/relationships">
   <p:sldMasterIdLst>
-    <p:sldMasterId id="2147483648" r:id="rId19"/>
+    <p:sldMasterId id="2147483648" r:id="rId22"/>
   </p:sldMasterIdLst>
   <p:sldIdLst>
     <p:sldId id="256" r:id="rId1"/>
@@ -23,6 +23,9 @@
     <p:sldId id="271" r:id="rId16"/>
     <p:sldId id="272" r:id="rId17"/>
     <p:sldId id="273" r:id="rId18"/>
+    <p:sldId id="274" r:id="rId19"/>
+    <p:sldId id="275" r:id="rId20"/>
+    <p:sldId id="276" r:id="rId21"/>
   </p:sldIdLst>
   <p:sldSz cx="12192000" cy="6858000" type="screen16x9"/>
   <p:notesSz cx="6858000" cy="9144000"/>
@@ -557,7 +560,154 @@
 </p:sld>
 </file>
 
+<file path=ppt/slides/slide19.xml><?xml version="1.0" encoding="utf-8"?>
+<p:sld xmlns:p="http://schemas.openxmlformats.org/presentationml/2006/main" xmlns:a="http://schemas.openxmlformats.org/drawingml/2006/main" xmlns:r="http://schemas.openxmlformats.org/officeDocument/2006/relationships">
+  <p:cSld>
+    <p:spTree>
+      <p:nvGrpSpPr>
+        <p:cNvPr id="1" name=""/>
+        <p:cNvGrpSpPr/>
+        <p:nvPr/>
+      </p:nvGrpSpPr>
+      <p:grpSpPr>
+        <a:xfrm>
+          <a:off x="0" y="0"/>
+          <a:ext cx="0" cy="0"/>
+          <a:chOff x="0" y="0"/>
+          <a:chExt cx="0" cy="0"/>
+        </a:xfrm>
+      </p:grpSpPr>
+      <p:pic>
+        <p:nvPicPr>
+          <p:cNvPr id="2" name="Slide image"/>
+          <p:cNvPicPr>
+            <a:picLocks noChangeAspect="1"/>
+          </p:cNvPicPr>
+          <p:nvPr/>
+        </p:nvPicPr>
+        <p:blipFill>
+          <a:blip r:embed="rId1"/>
+          <a:stretch>
+            <a:fillRect/>
+          </a:stretch>
+        </p:blipFill>
+        <p:spPr>
+          <a:xfrm>
+            <a:off x="0" y="0"/>
+            <a:ext cx="12192000" cy="6858000"/>
+          </a:xfrm>
+          <a:prstGeom prst="rect">
+            <a:avLst/>
+          </a:prstGeom>
+        </p:spPr>
+      </p:pic>
+    </p:spTree>
+  </p:cSld>
+  <p:clrMapOvr>
+    <a:masterClrMapping/>
+  </p:clrMapOvr>
+</p:sld>
+</file>
+
 <file path=ppt/slides/slide2.xml><?xml version="1.0" encoding="utf-8"?>
+<p:sld xmlns:p="http://schemas.openxmlformats.org/presentationml/2006/main" xmlns:a="http://schemas.openxmlformats.org/drawingml/2006/main" xmlns:r="http://schemas.openxmlformats.org/officeDocument/2006/relationships">
+  <p:cSld>
+    <p:spTree>
+      <p:nvGrpSpPr>
+        <p:cNvPr id="1" name=""/>
+        <p:cNvGrpSpPr/>
+        <p:nvPr/>
+      </p:nvGrpSpPr>
+      <p:grpSpPr>
+        <a:xfrm>
+          <a:off x="0" y="0"/>
+          <a:ext cx="0" cy="0"/>
+          <a:chOff x="0" y="0"/>
+          <a:chExt cx="0" cy="0"/>
+        </a:xfrm>
+      </p:grpSpPr>
+      <p:pic>
+        <p:nvPicPr>
+          <p:cNvPr id="2" name="Slide image"/>
+          <p:cNvPicPr>
+            <a:picLocks noChangeAspect="1"/>
+          </p:cNvPicPr>
+          <p:nvPr/>
+        </p:nvPicPr>
+        <p:blipFill>
+          <a:blip r:embed="rId1"/>
+          <a:stretch>
+            <a:fillRect/>
+          </a:stretch>
+        </p:blipFill>
+        <p:spPr>
+          <a:xfrm>
+            <a:off x="0" y="0"/>
+            <a:ext cx="12192000" cy="6858000"/>
+          </a:xfrm>
+          <a:prstGeom prst="rect">
+            <a:avLst/>
+          </a:prstGeom>
+        </p:spPr>
+      </p:pic>
+    </p:spTree>
+  </p:cSld>
+  <p:clrMapOvr>
+    <a:masterClrMapping/>
+  </p:clrMapOvr>
+</p:sld>
+</file>
+
+<file path=ppt/slides/slide20.xml><?xml version="1.0" encoding="utf-8"?>
+<p:sld xmlns:p="http://schemas.openxmlformats.org/presentationml/2006/main" xmlns:a="http://schemas.openxmlformats.org/drawingml/2006/main" xmlns:r="http://schemas.openxmlformats.org/officeDocument/2006/relationships">
+  <p:cSld>
+    <p:spTree>
+      <p:nvGrpSpPr>
+        <p:cNvPr id="1" name=""/>
+        <p:cNvGrpSpPr/>
+        <p:nvPr/>
+      </p:nvGrpSpPr>
+      <p:grpSpPr>
+        <a:xfrm>
+          <a:off x="0" y="0"/>
+          <a:ext cx="0" cy="0"/>
+          <a:chOff x="0" y="0"/>
+          <a:chExt cx="0" cy="0"/>
+        </a:xfrm>
+      </p:grpSpPr>
+      <p:pic>
+        <p:nvPicPr>
+          <p:cNvPr id="2" name="Slide image"/>
+          <p:cNvPicPr>
+            <a:picLocks noChangeAspect="1"/>
+          </p:cNvPicPr>
+          <p:nvPr/>
+        </p:nvPicPr>
+        <p:blipFill>
+          <a:blip r:embed="rId1"/>
+          <a:stretch>
+            <a:fillRect/>
+          </a:stretch>
+        </p:blipFill>
+        <p:spPr>
+          <a:xfrm>
+            <a:off x="0" y="0"/>
+            <a:ext cx="12192000" cy="6858000"/>
+          </a:xfrm>
+          <a:prstGeom prst="rect">
+            <a:avLst/>
+          </a:prstGeom>
+        </p:spPr>
+      </p:pic>
+    </p:spTree>
+  </p:cSld>
+  <p:clrMapOvr>
+    <a:masterClrMapping/>
+  </p:clrMapOvr>
+</p:sld>
+</file>
+
+<file path=ppt/slides/slide21.xml><?xml version="1.0" encoding="utf-8"?>
 <p:sld xmlns:p="http://schemas.openxmlformats.org/presentationml/2006/main" xmlns:a="http://schemas.openxmlformats.org/drawingml/2006/main" xmlns:r="http://schemas.openxmlformats.org/officeDocument/2006/relationships">
   <p:cSld>
     <p:spTree>

--- a/docs/High-Performance Implementation of Multigrid Solver for Lattice QCD.pptx
+++ b/docs/High-Performance Implementation of Multigrid Solver for Lattice QCD.pptx
@@ -2,7 +2,7 @@
 <file path=ppt/presentation.xml><?xml version="1.0" encoding="utf-8"?>
 <p:presentation xmlns:p="http://schemas.openxmlformats.org/presentationml/2006/main" xmlns:a="http://schemas.openxmlformats.org/drawingml/2006/main" xmlns:r="http://schemas.openxmlformats.org/officeDocument/2006/relationships">
   <p:sldMasterIdLst>
-    <p:sldMasterId id="2147483648" r:id="rId22"/>
+    <p:sldMasterId id="2147483648" r:id="rId18"/>
   </p:sldMasterIdLst>
   <p:sldIdLst>
     <p:sldId id="256" r:id="rId1"/>
@@ -22,10 +22,6 @@
     <p:sldId id="270" r:id="rId15"/>
     <p:sldId id="271" r:id="rId16"/>
     <p:sldId id="272" r:id="rId17"/>
-    <p:sldId id="273" r:id="rId18"/>
-    <p:sldId id="274" r:id="rId19"/>
-    <p:sldId id="275" r:id="rId20"/>
-    <p:sldId id="276" r:id="rId21"/>
   </p:sldIdLst>
   <p:sldSz cx="12192000" cy="6858000" type="screen16x9"/>
   <p:notesSz cx="6858000" cy="9144000"/>
@@ -34,15 +30,22 @@
 </file>
 
 <file path=ppt/slideLayouts/slideLayout1.xml><?xml version="1.0" encoding="utf-8"?>
-<p:sldLayout xmlns:p="http://schemas.openxmlformats.org/presentationml/2006/main" xmlns:a="http://schemas.openxmlformats.org/drawingml/2006/main" xmlns:r="http://schemas.openxmlformats.org/officeDocument/2006/relationships" type="blank">
-  <p:cSld>
-    <p:spTree>
-      <p:nvGrpSpPr>
-        <p:cNvPr id="1" name=""/>
-        <p:cNvGrpSpPr/>
-        <p:nvPr/>
-      </p:nvGrpSpPr>
-      <p:grpSpPr/>
+<p:sldLayout xmlns:p="http://schemas.openxmlformats.org/presentationml/2006/main" xmlns:a="http://schemas.openxmlformats.org/drawingml/2006/main" xmlns:r="http://schemas.openxmlformats.org/officeDocument/2006/relationships" type="blank" preserve="1">
+  <p:cSld name="Blank">
+    <p:spTree>
+      <p:nvGrpSpPr>
+        <p:cNvPr id="1" name=""/>
+        <p:cNvGrpSpPr/>
+        <p:nvPr/>
+      </p:nvGrpSpPr>
+      <p:grpSpPr>
+        <a:xfrm>
+          <a:off x="0" y="0"/>
+          <a:ext cx="0" cy="0"/>
+          <a:chOff x="0" y="0"/>
+          <a:chExt cx="0" cy="0"/>
+        </a:xfrm>
+      </p:grpSpPr>
     </p:spTree>
   </p:cSld>
   <p:clrMapOvr>
@@ -53,43 +56,55 @@
 
 <file path=ppt/slideMasters/slideMaster1.xml><?xml version="1.0" encoding="utf-8"?>
 <p:sldMaster xmlns:p="http://schemas.openxmlformats.org/presentationml/2006/main" xmlns:a="http://schemas.openxmlformats.org/drawingml/2006/main" xmlns:r="http://schemas.openxmlformats.org/officeDocument/2006/relationships">
-  <p:cSld>
-    <p:spTree>
-      <p:nvGrpSpPr>
-        <p:cNvPr id="1" name=""/>
-        <p:cNvGrpSpPr/>
-        <p:nvPr/>
-      </p:nvGrpSpPr>
-      <p:grpSpPr/>
+  <p:cSld name="PyQCU MultiGrid">
+    <p:spTree>
+      <p:nvGrpSpPr>
+        <p:cNvPr id="1" name=""/>
+        <p:cNvGrpSpPr/>
+        <p:nvPr/>
+      </p:nvGrpSpPr>
+      <p:grpSpPr>
+        <a:xfrm>
+          <a:off x="0" y="0"/>
+          <a:ext cx="0" cy="0"/>
+          <a:chOff x="0" y="0"/>
+          <a:chExt cx="0" cy="0"/>
+        </a:xfrm>
+      </p:grpSpPr>
     </p:spTree>
   </p:cSld>
   <p:clrMap accent1="accent1" accent2="accent2" accent3="accent3" accent4="accent4" accent5="accent5" accent6="accent6" bg1="lt1" bg2="lt2" folHlink="folHlink" hlink="hlink" tx1="dk1" tx2="dk2"/>
   <p:sldLayoutIdLst>
     <p:sldLayoutId id="1" r:id="rId1"/>
   </p:sldLayoutIdLst>
+  <p:txStyles>
+    <p:titleStyle/>
+    <p:bodyStyle/>
+    <p:otherStyle/>
+  </p:txStyles>
 </p:sldMaster>
 </file>
 
 <file path=ppt/slides/slide1.xml><?xml version="1.0" encoding="utf-8"?>
 <p:sld xmlns:p="http://schemas.openxmlformats.org/presentationml/2006/main" xmlns:a="http://schemas.openxmlformats.org/drawingml/2006/main" xmlns:r="http://schemas.openxmlformats.org/officeDocument/2006/relationships">
-  <p:cSld>
-    <p:spTree>
-      <p:nvGrpSpPr>
-        <p:cNvPr id="1" name=""/>
-        <p:cNvGrpSpPr/>
-        <p:nvPr/>
-      </p:nvGrpSpPr>
-      <p:grpSpPr>
-        <a:xfrm>
-          <a:off x="0" y="0"/>
-          <a:ext cx="0" cy="0"/>
-          <a:chOff x="0" y="0"/>
-          <a:chExt cx="0" cy="0"/>
-        </a:xfrm>
-      </p:grpSpPr>
-      <p:pic>
-        <p:nvPicPr>
-          <p:cNvPr id="2" name="Slide image"/>
+  <p:cSld name="">
+    <p:spTree>
+      <p:nvGrpSpPr>
+        <p:cNvPr id="1" name=""/>
+        <p:cNvGrpSpPr/>
+        <p:nvPr/>
+      </p:nvGrpSpPr>
+      <p:grpSpPr>
+        <a:xfrm>
+          <a:off x="0" y="0"/>
+          <a:ext cx="0" cy="0"/>
+          <a:chOff x="0" y="0"/>
+          <a:chExt cx="0" cy="0"/>
+        </a:xfrm>
+      </p:grpSpPr>
+      <p:pic>
+        <p:nvPicPr>
+          <p:cNvPr id="2" name="Slide image" descr="Rendered PyQCU MultiGrid slide"/>
           <p:cNvPicPr>
             <a:picLocks noChangeAspect="1"/>
           </p:cNvPicPr>
@@ -121,24 +136,24 @@
 
 <file path=ppt/slides/slide10.xml><?xml version="1.0" encoding="utf-8"?>
 <p:sld xmlns:p="http://schemas.openxmlformats.org/presentationml/2006/main" xmlns:a="http://schemas.openxmlformats.org/drawingml/2006/main" xmlns:r="http://schemas.openxmlformats.org/officeDocument/2006/relationships">
-  <p:cSld>
-    <p:spTree>
-      <p:nvGrpSpPr>
-        <p:cNvPr id="1" name=""/>
-        <p:cNvGrpSpPr/>
-        <p:nvPr/>
-      </p:nvGrpSpPr>
-      <p:grpSpPr>
-        <a:xfrm>
-          <a:off x="0" y="0"/>
-          <a:ext cx="0" cy="0"/>
-          <a:chOff x="0" y="0"/>
-          <a:chExt cx="0" cy="0"/>
-        </a:xfrm>
-      </p:grpSpPr>
-      <p:pic>
-        <p:nvPicPr>
-          <p:cNvPr id="2" name="Slide image"/>
+  <p:cSld name="">
+    <p:spTree>
+      <p:nvGrpSpPr>
+        <p:cNvPr id="1" name=""/>
+        <p:cNvGrpSpPr/>
+        <p:nvPr/>
+      </p:nvGrpSpPr>
+      <p:grpSpPr>
+        <a:xfrm>
+          <a:off x="0" y="0"/>
+          <a:ext cx="0" cy="0"/>
+          <a:chOff x="0" y="0"/>
+          <a:chExt cx="0" cy="0"/>
+        </a:xfrm>
+      </p:grpSpPr>
+      <p:pic>
+        <p:nvPicPr>
+          <p:cNvPr id="2" name="Slide image" descr="Rendered PyQCU MultiGrid slide"/>
           <p:cNvPicPr>
             <a:picLocks noChangeAspect="1"/>
           </p:cNvPicPr>
@@ -170,24 +185,24 @@
 
 <file path=ppt/slides/slide11.xml><?xml version="1.0" encoding="utf-8"?>
 <p:sld xmlns:p="http://schemas.openxmlformats.org/presentationml/2006/main" xmlns:a="http://schemas.openxmlformats.org/drawingml/2006/main" xmlns:r="http://schemas.openxmlformats.org/officeDocument/2006/relationships">
-  <p:cSld>
-    <p:spTree>
-      <p:nvGrpSpPr>
-        <p:cNvPr id="1" name=""/>
-        <p:cNvGrpSpPr/>
-        <p:nvPr/>
-      </p:nvGrpSpPr>
-      <p:grpSpPr>
-        <a:xfrm>
-          <a:off x="0" y="0"/>
-          <a:ext cx="0" cy="0"/>
-          <a:chOff x="0" y="0"/>
-          <a:chExt cx="0" cy="0"/>
-        </a:xfrm>
-      </p:grpSpPr>
-      <p:pic>
-        <p:nvPicPr>
-          <p:cNvPr id="2" name="Slide image"/>
+  <p:cSld name="">
+    <p:spTree>
+      <p:nvGrpSpPr>
+        <p:cNvPr id="1" name=""/>
+        <p:cNvGrpSpPr/>
+        <p:nvPr/>
+      </p:nvGrpSpPr>
+      <p:grpSpPr>
+        <a:xfrm>
+          <a:off x="0" y="0"/>
+          <a:ext cx="0" cy="0"/>
+          <a:chOff x="0" y="0"/>
+          <a:chExt cx="0" cy="0"/>
+        </a:xfrm>
+      </p:grpSpPr>
+      <p:pic>
+        <p:nvPicPr>
+          <p:cNvPr id="2" name="Slide image" descr="Rendered PyQCU MultiGrid slide"/>
           <p:cNvPicPr>
             <a:picLocks noChangeAspect="1"/>
           </p:cNvPicPr>
@@ -219,24 +234,24 @@
 
 <file path=ppt/slides/slide12.xml><?xml version="1.0" encoding="utf-8"?>
 <p:sld xmlns:p="http://schemas.openxmlformats.org/presentationml/2006/main" xmlns:a="http://schemas.openxmlformats.org/drawingml/2006/main" xmlns:r="http://schemas.openxmlformats.org/officeDocument/2006/relationships">
-  <p:cSld>
-    <p:spTree>
-      <p:nvGrpSpPr>
-        <p:cNvPr id="1" name=""/>
-        <p:cNvGrpSpPr/>
-        <p:nvPr/>
-      </p:nvGrpSpPr>
-      <p:grpSpPr>
-        <a:xfrm>
-          <a:off x="0" y="0"/>
-          <a:ext cx="0" cy="0"/>
-          <a:chOff x="0" y="0"/>
-          <a:chExt cx="0" cy="0"/>
-        </a:xfrm>
-      </p:grpSpPr>
-      <p:pic>
-        <p:nvPicPr>
-          <p:cNvPr id="2" name="Slide image"/>
+  <p:cSld name="">
+    <p:spTree>
+      <p:nvGrpSpPr>
+        <p:cNvPr id="1" name=""/>
+        <p:cNvGrpSpPr/>
+        <p:nvPr/>
+      </p:nvGrpSpPr>
+      <p:grpSpPr>
+        <a:xfrm>
+          <a:off x="0" y="0"/>
+          <a:ext cx="0" cy="0"/>
+          <a:chOff x="0" y="0"/>
+          <a:chExt cx="0" cy="0"/>
+        </a:xfrm>
+      </p:grpSpPr>
+      <p:pic>
+        <p:nvPicPr>
+          <p:cNvPr id="2" name="Slide image" descr="Rendered PyQCU MultiGrid slide"/>
           <p:cNvPicPr>
             <a:picLocks noChangeAspect="1"/>
           </p:cNvPicPr>
@@ -268,24 +283,24 @@
 
 <file path=ppt/slides/slide13.xml><?xml version="1.0" encoding="utf-8"?>
 <p:sld xmlns:p="http://schemas.openxmlformats.org/presentationml/2006/main" xmlns:a="http://schemas.openxmlformats.org/drawingml/2006/main" xmlns:r="http://schemas.openxmlformats.org/officeDocument/2006/relationships">
-  <p:cSld>
-    <p:spTree>
-      <p:nvGrpSpPr>
-        <p:cNvPr id="1" name=""/>
-        <p:cNvGrpSpPr/>
-        <p:nvPr/>
-      </p:nvGrpSpPr>
-      <p:grpSpPr>
-        <a:xfrm>
-          <a:off x="0" y="0"/>
-          <a:ext cx="0" cy="0"/>
-          <a:chOff x="0" y="0"/>
-          <a:chExt cx="0" cy="0"/>
-        </a:xfrm>
-      </p:grpSpPr>
-      <p:pic>
-        <p:nvPicPr>
-          <p:cNvPr id="2" name="Slide image"/>
+  <p:cSld name="">
+    <p:spTree>
+      <p:nvGrpSpPr>
+        <p:cNvPr id="1" name=""/>
+        <p:cNvGrpSpPr/>
+        <p:nvPr/>
+      </p:nvGrpSpPr>
+      <p:grpSpPr>
+        <a:xfrm>
+          <a:off x="0" y="0"/>
+          <a:ext cx="0" cy="0"/>
+          <a:chOff x="0" y="0"/>
+          <a:chExt cx="0" cy="0"/>
+        </a:xfrm>
+      </p:grpSpPr>
+      <p:pic>
+        <p:nvPicPr>
+          <p:cNvPr id="2" name="Slide image" descr="Rendered PyQCU MultiGrid slide"/>
           <p:cNvPicPr>
             <a:picLocks noChangeAspect="1"/>
           </p:cNvPicPr>
@@ -317,24 +332,24 @@
 
 <file path=ppt/slides/slide14.xml><?xml version="1.0" encoding="utf-8"?>
 <p:sld xmlns:p="http://schemas.openxmlformats.org/presentationml/2006/main" xmlns:a="http://schemas.openxmlformats.org/drawingml/2006/main" xmlns:r="http://schemas.openxmlformats.org/officeDocument/2006/relationships">
-  <p:cSld>
-    <p:spTree>
-      <p:nvGrpSpPr>
-        <p:cNvPr id="1" name=""/>
-        <p:cNvGrpSpPr/>
-        <p:nvPr/>
-      </p:nvGrpSpPr>
-      <p:grpSpPr>
-        <a:xfrm>
-          <a:off x="0" y="0"/>
-          <a:ext cx="0" cy="0"/>
-          <a:chOff x="0" y="0"/>
-          <a:chExt cx="0" cy="0"/>
-        </a:xfrm>
-      </p:grpSpPr>
-      <p:pic>
-        <p:nvPicPr>
-          <p:cNvPr id="2" name="Slide image"/>
+  <p:cSld name="">
+    <p:spTree>
+      <p:nvGrpSpPr>
+        <p:cNvPr id="1" name=""/>
+        <p:cNvGrpSpPr/>
+        <p:nvPr/>
+      </p:nvGrpSpPr>
+      <p:grpSpPr>
+        <a:xfrm>
+          <a:off x="0" y="0"/>
+          <a:ext cx="0" cy="0"/>
+          <a:chOff x="0" y="0"/>
+          <a:chExt cx="0" cy="0"/>
+        </a:xfrm>
+      </p:grpSpPr>
+      <p:pic>
+        <p:nvPicPr>
+          <p:cNvPr id="2" name="Slide image" descr="Rendered PyQCU MultiGrid slide"/>
           <p:cNvPicPr>
             <a:picLocks noChangeAspect="1"/>
           </p:cNvPicPr>
@@ -366,24 +381,24 @@
 
 <file path=ppt/slides/slide15.xml><?xml version="1.0" encoding="utf-8"?>
 <p:sld xmlns:p="http://schemas.openxmlformats.org/presentationml/2006/main" xmlns:a="http://schemas.openxmlformats.org/drawingml/2006/main" xmlns:r="http://schemas.openxmlformats.org/officeDocument/2006/relationships">
-  <p:cSld>
-    <p:spTree>
-      <p:nvGrpSpPr>
-        <p:cNvPr id="1" name=""/>
-        <p:cNvGrpSpPr/>
-        <p:nvPr/>
-      </p:nvGrpSpPr>
-      <p:grpSpPr>
-        <a:xfrm>
-          <a:off x="0" y="0"/>
-          <a:ext cx="0" cy="0"/>
-          <a:chOff x="0" y="0"/>
-          <a:chExt cx="0" cy="0"/>
-        </a:xfrm>
-      </p:grpSpPr>
-      <p:pic>
-        <p:nvPicPr>
-          <p:cNvPr id="2" name="Slide image"/>
+  <p:cSld name="">
+    <p:spTree>
+      <p:nvGrpSpPr>
+        <p:cNvPr id="1" name=""/>
+        <p:cNvGrpSpPr/>
+        <p:nvPr/>
+      </p:nvGrpSpPr>
+      <p:grpSpPr>
+        <a:xfrm>
+          <a:off x="0" y="0"/>
+          <a:ext cx="0" cy="0"/>
+          <a:chOff x="0" y="0"/>
+          <a:chExt cx="0" cy="0"/>
+        </a:xfrm>
+      </p:grpSpPr>
+      <p:pic>
+        <p:nvPicPr>
+          <p:cNvPr id="2" name="Slide image" descr="Rendered PyQCU MultiGrid slide"/>
           <p:cNvPicPr>
             <a:picLocks noChangeAspect="1"/>
           </p:cNvPicPr>
@@ -415,24 +430,24 @@
 
 <file path=ppt/slides/slide16.xml><?xml version="1.0" encoding="utf-8"?>
 <p:sld xmlns:p="http://schemas.openxmlformats.org/presentationml/2006/main" xmlns:a="http://schemas.openxmlformats.org/drawingml/2006/main" xmlns:r="http://schemas.openxmlformats.org/officeDocument/2006/relationships">
-  <p:cSld>
-    <p:spTree>
-      <p:nvGrpSpPr>
-        <p:cNvPr id="1" name=""/>
-        <p:cNvGrpSpPr/>
-        <p:nvPr/>
-      </p:nvGrpSpPr>
-      <p:grpSpPr>
-        <a:xfrm>
-          <a:off x="0" y="0"/>
-          <a:ext cx="0" cy="0"/>
-          <a:chOff x="0" y="0"/>
-          <a:chExt cx="0" cy="0"/>
-        </a:xfrm>
-      </p:grpSpPr>
-      <p:pic>
-        <p:nvPicPr>
-          <p:cNvPr id="2" name="Slide image"/>
+  <p:cSld name="">
+    <p:spTree>
+      <p:nvGrpSpPr>
+        <p:cNvPr id="1" name=""/>
+        <p:cNvGrpSpPr/>
+        <p:nvPr/>
+      </p:nvGrpSpPr>
+      <p:grpSpPr>
+        <a:xfrm>
+          <a:off x="0" y="0"/>
+          <a:ext cx="0" cy="0"/>
+          <a:chOff x="0" y="0"/>
+          <a:chExt cx="0" cy="0"/>
+        </a:xfrm>
+      </p:grpSpPr>
+      <p:pic>
+        <p:nvPicPr>
+          <p:cNvPr id="2" name="Slide image" descr="Rendered PyQCU MultiGrid slide"/>
           <p:cNvPicPr>
             <a:picLocks noChangeAspect="1"/>
           </p:cNvPicPr>
@@ -464,122 +479,24 @@
 
 <file path=ppt/slides/slide17.xml><?xml version="1.0" encoding="utf-8"?>
 <p:sld xmlns:p="http://schemas.openxmlformats.org/presentationml/2006/main" xmlns:a="http://schemas.openxmlformats.org/drawingml/2006/main" xmlns:r="http://schemas.openxmlformats.org/officeDocument/2006/relationships">
-  <p:cSld>
-    <p:spTree>
-      <p:nvGrpSpPr>
-        <p:cNvPr id="1" name=""/>
-        <p:cNvGrpSpPr/>
-        <p:nvPr/>
-      </p:nvGrpSpPr>
-      <p:grpSpPr>
-        <a:xfrm>
-          <a:off x="0" y="0"/>
-          <a:ext cx="0" cy="0"/>
-          <a:chOff x="0" y="0"/>
-          <a:chExt cx="0" cy="0"/>
-        </a:xfrm>
-      </p:grpSpPr>
-      <p:pic>
-        <p:nvPicPr>
-          <p:cNvPr id="2" name="Slide image"/>
-          <p:cNvPicPr>
-            <a:picLocks noChangeAspect="1"/>
-          </p:cNvPicPr>
-          <p:nvPr/>
-        </p:nvPicPr>
-        <p:blipFill>
-          <a:blip r:embed="rId1"/>
-          <a:stretch>
-            <a:fillRect/>
-          </a:stretch>
-        </p:blipFill>
-        <p:spPr>
-          <a:xfrm>
-            <a:off x="0" y="0"/>
-            <a:ext cx="12192000" cy="6858000"/>
-          </a:xfrm>
-          <a:prstGeom prst="rect">
-            <a:avLst/>
-          </a:prstGeom>
-        </p:spPr>
-      </p:pic>
-    </p:spTree>
-  </p:cSld>
-  <p:clrMapOvr>
-    <a:masterClrMapping/>
-  </p:clrMapOvr>
-</p:sld>
-</file>
-
-<file path=ppt/slides/slide18.xml><?xml version="1.0" encoding="utf-8"?>
-<p:sld xmlns:p="http://schemas.openxmlformats.org/presentationml/2006/main" xmlns:a="http://schemas.openxmlformats.org/drawingml/2006/main" xmlns:r="http://schemas.openxmlformats.org/officeDocument/2006/relationships">
-  <p:cSld>
-    <p:spTree>
-      <p:nvGrpSpPr>
-        <p:cNvPr id="1" name=""/>
-        <p:cNvGrpSpPr/>
-        <p:nvPr/>
-      </p:nvGrpSpPr>
-      <p:grpSpPr>
-        <a:xfrm>
-          <a:off x="0" y="0"/>
-          <a:ext cx="0" cy="0"/>
-          <a:chOff x="0" y="0"/>
-          <a:chExt cx="0" cy="0"/>
-        </a:xfrm>
-      </p:grpSpPr>
-      <p:pic>
-        <p:nvPicPr>
-          <p:cNvPr id="2" name="Slide image"/>
-          <p:cNvPicPr>
-            <a:picLocks noChangeAspect="1"/>
-          </p:cNvPicPr>
-          <p:nvPr/>
-        </p:nvPicPr>
-        <p:blipFill>
-          <a:blip r:embed="rId1"/>
-          <a:stretch>
-            <a:fillRect/>
-          </a:stretch>
-        </p:blipFill>
-        <p:spPr>
-          <a:xfrm>
-            <a:off x="0" y="0"/>
-            <a:ext cx="12192000" cy="6858000"/>
-          </a:xfrm>
-          <a:prstGeom prst="rect">
-            <a:avLst/>
-          </a:prstGeom>
-        </p:spPr>
-      </p:pic>
-    </p:spTree>
-  </p:cSld>
-  <p:clrMapOvr>
-    <a:masterClrMapping/>
-  </p:clrMapOvr>
-</p:sld>
-</file>
-
-<file path=ppt/slides/slide19.xml><?xml version="1.0" encoding="utf-8"?>
-<p:sld xmlns:p="http://schemas.openxmlformats.org/presentationml/2006/main" xmlns:a="http://schemas.openxmlformats.org/drawingml/2006/main" xmlns:r="http://schemas.openxmlformats.org/officeDocument/2006/relationships">
-  <p:cSld>
-    <p:spTree>
-      <p:nvGrpSpPr>
-        <p:cNvPr id="1" name=""/>
-        <p:cNvGrpSpPr/>
-        <p:nvPr/>
-      </p:nvGrpSpPr>
-      <p:grpSpPr>
-        <a:xfrm>
-          <a:off x="0" y="0"/>
-          <a:ext cx="0" cy="0"/>
-          <a:chOff x="0" y="0"/>
-          <a:chExt cx="0" cy="0"/>
-        </a:xfrm>
-      </p:grpSpPr>
-      <p:pic>
-        <p:nvPicPr>
-          <p:cNvPr id="2" name="Slide image"/>
+  <p:cSld name="">
+    <p:spTree>
+      <p:nvGrpSpPr>
+        <p:cNvPr id="1" name=""/>
+        <p:cNvGrpSpPr/>
+        <p:nvPr/>
+      </p:nvGrpSpPr>
+      <p:grpSpPr>
+        <a:xfrm>
+          <a:off x="0" y="0"/>
+          <a:ext cx="0" cy="0"/>
+          <a:chOff x="0" y="0"/>
+          <a:chExt cx="0" cy="0"/>
+        </a:xfrm>
+      </p:grpSpPr>
+      <p:pic>
+        <p:nvPicPr>
+          <p:cNvPr id="2" name="Slide image" descr="Rendered PyQCU MultiGrid slide"/>
           <p:cNvPicPr>
             <a:picLocks noChangeAspect="1"/>
           </p:cNvPicPr>
@@ -611,122 +528,24 @@
 
 <file path=ppt/slides/slide2.xml><?xml version="1.0" encoding="utf-8"?>
 <p:sld xmlns:p="http://schemas.openxmlformats.org/presentationml/2006/main" xmlns:a="http://schemas.openxmlformats.org/drawingml/2006/main" xmlns:r="http://schemas.openxmlformats.org/officeDocument/2006/relationships">
-  <p:cSld>
-    <p:spTree>
-      <p:nvGrpSpPr>
-        <p:cNvPr id="1" name=""/>
-        <p:cNvGrpSpPr/>
-        <p:nvPr/>
-      </p:nvGrpSpPr>
-      <p:grpSpPr>
-        <a:xfrm>
-          <a:off x="0" y="0"/>
-          <a:ext cx="0" cy="0"/>
-          <a:chOff x="0" y="0"/>
-          <a:chExt cx="0" cy="0"/>
-        </a:xfrm>
-      </p:grpSpPr>
-      <p:pic>
-        <p:nvPicPr>
-          <p:cNvPr id="2" name="Slide image"/>
-          <p:cNvPicPr>
-            <a:picLocks noChangeAspect="1"/>
-          </p:cNvPicPr>
-          <p:nvPr/>
-        </p:nvPicPr>
-        <p:blipFill>
-          <a:blip r:embed="rId1"/>
-          <a:stretch>
-            <a:fillRect/>
-          </a:stretch>
-        </p:blipFill>
-        <p:spPr>
-          <a:xfrm>
-            <a:off x="0" y="0"/>
-            <a:ext cx="12192000" cy="6858000"/>
-          </a:xfrm>
-          <a:prstGeom prst="rect">
-            <a:avLst/>
-          </a:prstGeom>
-        </p:spPr>
-      </p:pic>
-    </p:spTree>
-  </p:cSld>
-  <p:clrMapOvr>
-    <a:masterClrMapping/>
-  </p:clrMapOvr>
-</p:sld>
-</file>
-
-<file path=ppt/slides/slide20.xml><?xml version="1.0" encoding="utf-8"?>
-<p:sld xmlns:p="http://schemas.openxmlformats.org/presentationml/2006/main" xmlns:a="http://schemas.openxmlformats.org/drawingml/2006/main" xmlns:r="http://schemas.openxmlformats.org/officeDocument/2006/relationships">
-  <p:cSld>
-    <p:spTree>
-      <p:nvGrpSpPr>
-        <p:cNvPr id="1" name=""/>
-        <p:cNvGrpSpPr/>
-        <p:nvPr/>
-      </p:nvGrpSpPr>
-      <p:grpSpPr>
-        <a:xfrm>
-          <a:off x="0" y="0"/>
-          <a:ext cx="0" cy="0"/>
-          <a:chOff x="0" y="0"/>
-          <a:chExt cx="0" cy="0"/>
-        </a:xfrm>
-      </p:grpSpPr>
-      <p:pic>
-        <p:nvPicPr>
-          <p:cNvPr id="2" name="Slide image"/>
-          <p:cNvPicPr>
-            <a:picLocks noChangeAspect="1"/>
-          </p:cNvPicPr>
-          <p:nvPr/>
-        </p:nvPicPr>
-        <p:blipFill>
-          <a:blip r:embed="rId1"/>
-          <a:stretch>
-            <a:fillRect/>
-          </a:stretch>
-        </p:blipFill>
-        <p:spPr>
-          <a:xfrm>
-            <a:off x="0" y="0"/>
-            <a:ext cx="12192000" cy="6858000"/>
-          </a:xfrm>
-          <a:prstGeom prst="rect">
-            <a:avLst/>
-          </a:prstGeom>
-        </p:spPr>
-      </p:pic>
-    </p:spTree>
-  </p:cSld>
-  <p:clrMapOvr>
-    <a:masterClrMapping/>
-  </p:clrMapOvr>
-</p:sld>
-</file>
-
-<file path=ppt/slides/slide21.xml><?xml version="1.0" encoding="utf-8"?>
-<p:sld xmlns:p="http://schemas.openxmlformats.org/presentationml/2006/main" xmlns:a="http://schemas.openxmlformats.org/drawingml/2006/main" xmlns:r="http://schemas.openxmlformats.org/officeDocument/2006/relationships">
-  <p:cSld>
-    <p:spTree>
-      <p:nvGrpSpPr>
-        <p:cNvPr id="1" name=""/>
-        <p:cNvGrpSpPr/>
-        <p:nvPr/>
-      </p:nvGrpSpPr>
-      <p:grpSpPr>
-        <a:xfrm>
-          <a:off x="0" y="0"/>
-          <a:ext cx="0" cy="0"/>
-          <a:chOff x="0" y="0"/>
-          <a:chExt cx="0" cy="0"/>
-        </a:xfrm>
-      </p:grpSpPr>
-      <p:pic>
-        <p:nvPicPr>
-          <p:cNvPr id="2" name="Slide image"/>
+  <p:cSld name="">
+    <p:spTree>
+      <p:nvGrpSpPr>
+        <p:cNvPr id="1" name=""/>
+        <p:cNvGrpSpPr/>
+        <p:nvPr/>
+      </p:nvGrpSpPr>
+      <p:grpSpPr>
+        <a:xfrm>
+          <a:off x="0" y="0"/>
+          <a:ext cx="0" cy="0"/>
+          <a:chOff x="0" y="0"/>
+          <a:chExt cx="0" cy="0"/>
+        </a:xfrm>
+      </p:grpSpPr>
+      <p:pic>
+        <p:nvPicPr>
+          <p:cNvPr id="2" name="Slide image" descr="Rendered PyQCU MultiGrid slide"/>
           <p:cNvPicPr>
             <a:picLocks noChangeAspect="1"/>
           </p:cNvPicPr>
@@ -758,24 +577,24 @@
 
 <file path=ppt/slides/slide3.xml><?xml version="1.0" encoding="utf-8"?>
 <p:sld xmlns:p="http://schemas.openxmlformats.org/presentationml/2006/main" xmlns:a="http://schemas.openxmlformats.org/drawingml/2006/main" xmlns:r="http://schemas.openxmlformats.org/officeDocument/2006/relationships">
-  <p:cSld>
-    <p:spTree>
-      <p:nvGrpSpPr>
-        <p:cNvPr id="1" name=""/>
-        <p:cNvGrpSpPr/>
-        <p:nvPr/>
-      </p:nvGrpSpPr>
-      <p:grpSpPr>
-        <a:xfrm>
-          <a:off x="0" y="0"/>
-          <a:ext cx="0" cy="0"/>
-          <a:chOff x="0" y="0"/>
-          <a:chExt cx="0" cy="0"/>
-        </a:xfrm>
-      </p:grpSpPr>
-      <p:pic>
-        <p:nvPicPr>
-          <p:cNvPr id="2" name="Slide image"/>
+  <p:cSld name="">
+    <p:spTree>
+      <p:nvGrpSpPr>
+        <p:cNvPr id="1" name=""/>
+        <p:cNvGrpSpPr/>
+        <p:nvPr/>
+      </p:nvGrpSpPr>
+      <p:grpSpPr>
+        <a:xfrm>
+          <a:off x="0" y="0"/>
+          <a:ext cx="0" cy="0"/>
+          <a:chOff x="0" y="0"/>
+          <a:chExt cx="0" cy="0"/>
+        </a:xfrm>
+      </p:grpSpPr>
+      <p:pic>
+        <p:nvPicPr>
+          <p:cNvPr id="2" name="Slide image" descr="Rendered PyQCU MultiGrid slide"/>
           <p:cNvPicPr>
             <a:picLocks noChangeAspect="1"/>
           </p:cNvPicPr>
@@ -807,24 +626,24 @@
 
 <file path=ppt/slides/slide4.xml><?xml version="1.0" encoding="utf-8"?>
 <p:sld xmlns:p="http://schemas.openxmlformats.org/presentationml/2006/main" xmlns:a="http://schemas.openxmlformats.org/drawingml/2006/main" xmlns:r="http://schemas.openxmlformats.org/officeDocument/2006/relationships">
-  <p:cSld>
-    <p:spTree>
-      <p:nvGrpSpPr>
-        <p:cNvPr id="1" name=""/>
-        <p:cNvGrpSpPr/>
-        <p:nvPr/>
-      </p:nvGrpSpPr>
-      <p:grpSpPr>
-        <a:xfrm>
-          <a:off x="0" y="0"/>
-          <a:ext cx="0" cy="0"/>
-          <a:chOff x="0" y="0"/>
-          <a:chExt cx="0" cy="0"/>
-        </a:xfrm>
-      </p:grpSpPr>
-      <p:pic>
-        <p:nvPicPr>
-          <p:cNvPr id="2" name="Slide image"/>
+  <p:cSld name="">
+    <p:spTree>
+      <p:nvGrpSpPr>
+        <p:cNvPr id="1" name=""/>
+        <p:cNvGrpSpPr/>
+        <p:nvPr/>
+      </p:nvGrpSpPr>
+      <p:grpSpPr>
+        <a:xfrm>
+          <a:off x="0" y="0"/>
+          <a:ext cx="0" cy="0"/>
+          <a:chOff x="0" y="0"/>
+          <a:chExt cx="0" cy="0"/>
+        </a:xfrm>
+      </p:grpSpPr>
+      <p:pic>
+        <p:nvPicPr>
+          <p:cNvPr id="2" name="Slide image" descr="Rendered PyQCU MultiGrid slide"/>
           <p:cNvPicPr>
             <a:picLocks noChangeAspect="1"/>
           </p:cNvPicPr>
@@ -856,24 +675,24 @@
 
 <file path=ppt/slides/slide5.xml><?xml version="1.0" encoding="utf-8"?>
 <p:sld xmlns:p="http://schemas.openxmlformats.org/presentationml/2006/main" xmlns:a="http://schemas.openxmlformats.org/drawingml/2006/main" xmlns:r="http://schemas.openxmlformats.org/officeDocument/2006/relationships">
-  <p:cSld>
-    <p:spTree>
-      <p:nvGrpSpPr>
-        <p:cNvPr id="1" name=""/>
-        <p:cNvGrpSpPr/>
-        <p:nvPr/>
-      </p:nvGrpSpPr>
-      <p:grpSpPr>
-        <a:xfrm>
-          <a:off x="0" y="0"/>
-          <a:ext cx="0" cy="0"/>
-          <a:chOff x="0" y="0"/>
-          <a:chExt cx="0" cy="0"/>
-        </a:xfrm>
-      </p:grpSpPr>
-      <p:pic>
-        <p:nvPicPr>
-          <p:cNvPr id="2" name="Slide image"/>
+  <p:cSld name="">
+    <p:spTree>
+      <p:nvGrpSpPr>
+        <p:cNvPr id="1" name=""/>
+        <p:cNvGrpSpPr/>
+        <p:nvPr/>
+      </p:nvGrpSpPr>
+      <p:grpSpPr>
+        <a:xfrm>
+          <a:off x="0" y="0"/>
+          <a:ext cx="0" cy="0"/>
+          <a:chOff x="0" y="0"/>
+          <a:chExt cx="0" cy="0"/>
+        </a:xfrm>
+      </p:grpSpPr>
+      <p:pic>
+        <p:nvPicPr>
+          <p:cNvPr id="2" name="Slide image" descr="Rendered PyQCU MultiGrid slide"/>
           <p:cNvPicPr>
             <a:picLocks noChangeAspect="1"/>
           </p:cNvPicPr>
@@ -905,24 +724,24 @@
 
 <file path=ppt/slides/slide6.xml><?xml version="1.0" encoding="utf-8"?>
 <p:sld xmlns:p="http://schemas.openxmlformats.org/presentationml/2006/main" xmlns:a="http://schemas.openxmlformats.org/drawingml/2006/main" xmlns:r="http://schemas.openxmlformats.org/officeDocument/2006/relationships">
-  <p:cSld>
-    <p:spTree>
-      <p:nvGrpSpPr>
-        <p:cNvPr id="1" name=""/>
-        <p:cNvGrpSpPr/>
-        <p:nvPr/>
-      </p:nvGrpSpPr>
-      <p:grpSpPr>
-        <a:xfrm>
-          <a:off x="0" y="0"/>
-          <a:ext cx="0" cy="0"/>
-          <a:chOff x="0" y="0"/>
-          <a:chExt cx="0" cy="0"/>
-        </a:xfrm>
-      </p:grpSpPr>
-      <p:pic>
-        <p:nvPicPr>
-          <p:cNvPr id="2" name="Slide image"/>
+  <p:cSld name="">
+    <p:spTree>
+      <p:nvGrpSpPr>
+        <p:cNvPr id="1" name=""/>
+        <p:cNvGrpSpPr/>
+        <p:nvPr/>
+      </p:nvGrpSpPr>
+      <p:grpSpPr>
+        <a:xfrm>
+          <a:off x="0" y="0"/>
+          <a:ext cx="0" cy="0"/>
+          <a:chOff x="0" y="0"/>
+          <a:chExt cx="0" cy="0"/>
+        </a:xfrm>
+      </p:grpSpPr>
+      <p:pic>
+        <p:nvPicPr>
+          <p:cNvPr id="2" name="Slide image" descr="Rendered PyQCU MultiGrid slide"/>
           <p:cNvPicPr>
             <a:picLocks noChangeAspect="1"/>
           </p:cNvPicPr>
@@ -954,24 +773,24 @@
 
 <file path=ppt/slides/slide7.xml><?xml version="1.0" encoding="utf-8"?>
 <p:sld xmlns:p="http://schemas.openxmlformats.org/presentationml/2006/main" xmlns:a="http://schemas.openxmlformats.org/drawingml/2006/main" xmlns:r="http://schemas.openxmlformats.org/officeDocument/2006/relationships">
-  <p:cSld>
-    <p:spTree>
-      <p:nvGrpSpPr>
-        <p:cNvPr id="1" name=""/>
-        <p:cNvGrpSpPr/>
-        <p:nvPr/>
-      </p:nvGrpSpPr>
-      <p:grpSpPr>
-        <a:xfrm>
-          <a:off x="0" y="0"/>
-          <a:ext cx="0" cy="0"/>
-          <a:chOff x="0" y="0"/>
-          <a:chExt cx="0" cy="0"/>
-        </a:xfrm>
-      </p:grpSpPr>
-      <p:pic>
-        <p:nvPicPr>
-          <p:cNvPr id="2" name="Slide image"/>
+  <p:cSld name="">
+    <p:spTree>
+      <p:nvGrpSpPr>
+        <p:cNvPr id="1" name=""/>
+        <p:cNvGrpSpPr/>
+        <p:nvPr/>
+      </p:nvGrpSpPr>
+      <p:grpSpPr>
+        <a:xfrm>
+          <a:off x="0" y="0"/>
+          <a:ext cx="0" cy="0"/>
+          <a:chOff x="0" y="0"/>
+          <a:chExt cx="0" cy="0"/>
+        </a:xfrm>
+      </p:grpSpPr>
+      <p:pic>
+        <p:nvPicPr>
+          <p:cNvPr id="2" name="Slide image" descr="Rendered PyQCU MultiGrid slide"/>
           <p:cNvPicPr>
             <a:picLocks noChangeAspect="1"/>
           </p:cNvPicPr>
@@ -1003,24 +822,24 @@
 
 <file path=ppt/slides/slide8.xml><?xml version="1.0" encoding="utf-8"?>
 <p:sld xmlns:p="http://schemas.openxmlformats.org/presentationml/2006/main" xmlns:a="http://schemas.openxmlformats.org/drawingml/2006/main" xmlns:r="http://schemas.openxmlformats.org/officeDocument/2006/relationships">
-  <p:cSld>
-    <p:spTree>
-      <p:nvGrpSpPr>
-        <p:cNvPr id="1" name=""/>
-        <p:cNvGrpSpPr/>
-        <p:nvPr/>
-      </p:nvGrpSpPr>
-      <p:grpSpPr>
-        <a:xfrm>
-          <a:off x="0" y="0"/>
-          <a:ext cx="0" cy="0"/>
-          <a:chOff x="0" y="0"/>
-          <a:chExt cx="0" cy="0"/>
-        </a:xfrm>
-      </p:grpSpPr>
-      <p:pic>
-        <p:nvPicPr>
-          <p:cNvPr id="2" name="Slide image"/>
+  <p:cSld name="">
+    <p:spTree>
+      <p:nvGrpSpPr>
+        <p:cNvPr id="1" name=""/>
+        <p:cNvGrpSpPr/>
+        <p:nvPr/>
+      </p:nvGrpSpPr>
+      <p:grpSpPr>
+        <a:xfrm>
+          <a:off x="0" y="0"/>
+          <a:ext cx="0" cy="0"/>
+          <a:chOff x="0" y="0"/>
+          <a:chExt cx="0" cy="0"/>
+        </a:xfrm>
+      </p:grpSpPr>
+      <p:pic>
+        <p:nvPicPr>
+          <p:cNvPr id="2" name="Slide image" descr="Rendered PyQCU MultiGrid slide"/>
           <p:cNvPicPr>
             <a:picLocks noChangeAspect="1"/>
           </p:cNvPicPr>
@@ -1052,24 +871,24 @@
 
 <file path=ppt/slides/slide9.xml><?xml version="1.0" encoding="utf-8"?>
 <p:sld xmlns:p="http://schemas.openxmlformats.org/presentationml/2006/main" xmlns:a="http://schemas.openxmlformats.org/drawingml/2006/main" xmlns:r="http://schemas.openxmlformats.org/officeDocument/2006/relationships">
-  <p:cSld>
-    <p:spTree>
-      <p:nvGrpSpPr>
-        <p:cNvPr id="1" name=""/>
-        <p:cNvGrpSpPr/>
-        <p:nvPr/>
-      </p:nvGrpSpPr>
-      <p:grpSpPr>
-        <a:xfrm>
-          <a:off x="0" y="0"/>
-          <a:ext cx="0" cy="0"/>
-          <a:chOff x="0" y="0"/>
-          <a:chExt cx="0" cy="0"/>
-        </a:xfrm>
-      </p:grpSpPr>
-      <p:pic>
-        <p:nvPicPr>
-          <p:cNvPr id="2" name="Slide image"/>
+  <p:cSld name="">
+    <p:spTree>
+      <p:nvGrpSpPr>
+        <p:cNvPr id="1" name=""/>
+        <p:cNvGrpSpPr/>
+        <p:nvPr/>
+      </p:nvGrpSpPr>
+      <p:grpSpPr>
+        <a:xfrm>
+          <a:off x="0" y="0"/>
+          <a:ext cx="0" cy="0"/>
+          <a:chOff x="0" y="0"/>
+          <a:chExt cx="0" cy="0"/>
+        </a:xfrm>
+      </p:grpSpPr>
+      <p:pic>
+        <p:nvPicPr>
+          <p:cNvPr id="2" name="Slide image" descr="Rendered PyQCU MultiGrid slide"/>
           <p:cNvPicPr>
             <a:picLocks noChangeAspect="1"/>
           </p:cNvPicPr>
@@ -1104,50 +923,52 @@
   <a:themeElements>
     <a:clrScheme name="PyQCU">
       <a:dk1>
-        <a:srgbClr val="1B2430"/>
+        <a:srgbClr val="17212B"/>
       </a:dk1>
       <a:lt1>
         <a:srgbClr val="FFFFFF"/>
       </a:lt1>
       <a:dk2>
-        <a:srgbClr val="17365D"/>
+        <a:srgbClr val="12355B"/>
       </a:dk2>
       <a:lt2>
-        <a:srgbClr val="EEF4FA"/>
+        <a:srgbClr val="EEF3F6"/>
       </a:lt2>
       <a:accent1>
-        <a:srgbClr val="2E6DB4"/>
+        <a:srgbClr val="245BA3"/>
       </a:accent1>
       <a:accent2>
-        <a:srgbClr val="168C8C"/>
+        <a:srgbClr val="0B7285"/>
       </a:accent2>
       <a:accent3>
-        <a:srgbClr val="C58A1A"/>
+        <a:srgbClr val="D08A1F"/>
       </a:accent3>
       <a:accent4>
-        <a:srgbClr val="D35B5B"/>
+        <a:srgbClr val="C94C5A"/>
       </a:accent4>
       <a:accent5>
-        <a:srgbClr val="687483"/>
+        <a:srgbClr val="53A6B8"/>
       </a:accent5>
       <a:accent6>
-        <a:srgbClr val="17365D"/>
+        <a:srgbClr val="3A7D5C"/>
       </a:accent6>
       <a:hlink>
-        <a:srgbClr val="2E6DB4"/>
+        <a:srgbClr val="245BA3"/>
       </a:hlink>
       <a:folHlink>
-        <a:srgbClr val="D35B5B"/>
+        <a:srgbClr val="C94C5A"/>
       </a:folHlink>
     </a:clrScheme>
     <a:fontScheme name="PyQCU">
       <a:majorFont>
-        <a:latin typeface="TeX Gyre Heros"/>
-        <a:ea typeface="FandolHei"/>
+        <a:latin typeface="AR PL UMing CN"/>
+        <a:ea typeface="AR PL UMing CN"/>
+        <a:cs typeface=""/>
       </a:majorFont>
       <a:minorFont>
-        <a:latin typeface="TeX Gyre Termes"/>
-        <a:ea typeface="FandolSong"/>
+        <a:latin typeface="AR PL UMing CN"/>
+        <a:ea typeface="AR PL UMing CN"/>
+        <a:cs typeface=""/>
       </a:minorFont>
     </a:fontScheme>
     <a:fmtScheme name="PyQCU">
@@ -1155,28 +976,59 @@
         <a:solidFill>
           <a:schemeClr val="phClr"/>
         </a:solidFill>
-        <a:solidFill>
-          <a:schemeClr val="phClr"/>
-        </a:solidFill>
-        <a:solidFill>
-          <a:schemeClr val="phClr"/>
-        </a:solidFill>
+        <a:gradFill rotWithShape="1">
+          <a:gsLst>
+            <a:gs pos="0">
+              <a:schemeClr val="phClr">
+                <a:lumMod val="110000"/>
+                <a:satMod val="105000"/>
+              </a:schemeClr>
+            </a:gs>
+            <a:gs pos="100000">
+              <a:schemeClr val="phClr">
+                <a:lumMod val="90000"/>
+                <a:satMod val="105000"/>
+              </a:schemeClr>
+            </a:gs>
+          </a:gsLst>
+          <a:lin ang="5400000" scaled="0"/>
+        </a:gradFill>
+        <a:gradFill rotWithShape="1">
+          <a:gsLst>
+            <a:gs pos="0">
+              <a:schemeClr val="phClr">
+                <a:lumMod val="110000"/>
+                <a:satMod val="105000"/>
+              </a:schemeClr>
+            </a:gs>
+            <a:gs pos="100000">
+              <a:schemeClr val="phClr">
+                <a:lumMod val="90000"/>
+                <a:satMod val="105000"/>
+              </a:schemeClr>
+            </a:gs>
+          </a:gsLst>
+          <a:lin ang="5400000" scaled="0"/>
+        </a:gradFill>
       </a:fillStyleLst>
       <a:lnStyleLst>
-        <a:ln w="6350">
+        <a:ln w="6350" cap="flat" cmpd="sng" algn="ctr">
           <a:solidFill>
             <a:schemeClr val="phClr"/>
           </a:solidFill>
+          <a:prstDash val="solid"/>
         </a:ln>
-        <a:ln w="12700">
+        <a:ln w="12700" cap="flat" cmpd="sng" algn="ctr">
           <a:solidFill>
             <a:schemeClr val="phClr"/>
           </a:solidFill>
+          <a:prstDash val="solid"/>
         </a:ln>
-        <a:ln w="19050">
+        <a:ln w="19050" cap="flat" cmpd="sng" algn="ctr">
           <a:solidFill>
             <a:schemeClr val="phClr"/>
           </a:solidFill>
+          <a:prstDash val="solid"/>
         </a:ln>
       </a:lnStyleLst>
       <a:effectStyleLst>
